--- a/Lessons/Lesson B1-1 - Problem Specification.pptx
+++ b/Lessons/Lesson B1-1 - Problem Specification.pptx
@@ -144,7 +144,7 @@
 <file path=ppt/revisionInfo.xml><?xml version="1.0" encoding="utf-8"?>
 <p1510:revInfo xmlns:a="http://schemas.openxmlformats.org/drawingml/2006/main" xmlns:r="http://schemas.openxmlformats.org/officeDocument/2006/relationships" xmlns:p1510="http://schemas.microsoft.com/office/powerpoint/2015/10/main">
   <p1510:revLst>
-    <p1510:client id="{4E438139-48DD-446F-9055-12CCC49A2A74}" v="24" dt="2025-10-01T15:18:58.396"/>
+    <p1510:client id="{89C8655B-AF3E-48D0-9098-E2D68391A6AB}" v="1" dt="2025-10-20T18:11:07.532"/>
   </p1510:revLst>
 </p1510:revInfo>
 </file>
@@ -154,26 +154,18 @@
   <pc:docChgLst>
     <pc:chgData name="Michael Hill" userId="41dba03d-e58d-4389-9894-554c10310ba4" providerId="ADAL" clId="{EF23FE1D-A042-481E-AFD7-2A9FB0847F54}"/>
     <pc:docChg chg="undo redo custSel addSld delSld modSld sldOrd">
-      <pc:chgData name="Michael Hill" userId="41dba03d-e58d-4389-9894-554c10310ba4" providerId="ADAL" clId="{EF23FE1D-A042-481E-AFD7-2A9FB0847F54}" dt="2025-10-01T15:25:49.634" v="6610" actId="20577"/>
+      <pc:chgData name="Michael Hill" userId="41dba03d-e58d-4389-9894-554c10310ba4" providerId="ADAL" clId="{EF23FE1D-A042-481E-AFD7-2A9FB0847F54}" dt="2025-10-20T18:11:09.633" v="6656" actId="120"/>
       <pc:docMkLst>
         <pc:docMk/>
       </pc:docMkLst>
       <pc:sldChg chg="delSp modSp mod setBg">
-        <pc:chgData name="Michael Hill" userId="41dba03d-e58d-4389-9894-554c10310ba4" providerId="ADAL" clId="{EF23FE1D-A042-481E-AFD7-2A9FB0847F54}" dt="2025-09-30T18:57:54.379" v="36" actId="20577"/>
+        <pc:chgData name="Michael Hill" userId="41dba03d-e58d-4389-9894-554c10310ba4" providerId="ADAL" clId="{EF23FE1D-A042-481E-AFD7-2A9FB0847F54}" dt="2025-10-20T18:10:55.613" v="6654" actId="404"/>
         <pc:sldMkLst>
           <pc:docMk/>
           <pc:sldMk cId="1878848435" sldId="256"/>
         </pc:sldMkLst>
-        <pc:spChg chg="del">
-          <ac:chgData name="Michael Hill" userId="41dba03d-e58d-4389-9894-554c10310ba4" providerId="ADAL" clId="{EF23FE1D-A042-481E-AFD7-2A9FB0847F54}" dt="2025-09-30T18:56:07.523" v="0" actId="478"/>
-          <ac:spMkLst>
-            <pc:docMk/>
-            <pc:sldMk cId="1878848435" sldId="256"/>
-            <ac:spMk id="2" creationId="{BF8076CA-76A1-8CBD-2EC2-C676B82F5E4F}"/>
-          </ac:spMkLst>
-        </pc:spChg>
         <pc:spChg chg="mod">
-          <ac:chgData name="Michael Hill" userId="41dba03d-e58d-4389-9894-554c10310ba4" providerId="ADAL" clId="{EF23FE1D-A042-481E-AFD7-2A9FB0847F54}" dt="2025-09-30T18:57:02.744" v="5" actId="207"/>
+          <ac:chgData name="Michael Hill" userId="41dba03d-e58d-4389-9894-554c10310ba4" providerId="ADAL" clId="{EF23FE1D-A042-481E-AFD7-2A9FB0847F54}" dt="2025-10-20T18:10:55.613" v="6654" actId="404"/>
           <ac:spMkLst>
             <pc:docMk/>
             <pc:sldMk cId="1878848435" sldId="256"/>
@@ -181,7 +173,7 @@
           </ac:spMkLst>
         </pc:spChg>
         <pc:spChg chg="mod">
-          <ac:chgData name="Michael Hill" userId="41dba03d-e58d-4389-9894-554c10310ba4" providerId="ADAL" clId="{EF23FE1D-A042-481E-AFD7-2A9FB0847F54}" dt="2025-09-30T18:57:38.294" v="14" actId="20577"/>
+          <ac:chgData name="Michael Hill" userId="41dba03d-e58d-4389-9894-554c10310ba4" providerId="ADAL" clId="{EF23FE1D-A042-481E-AFD7-2A9FB0847F54}" dt="2025-10-02T15:02:24.499" v="6618" actId="20577"/>
           <ac:spMkLst>
             <pc:docMk/>
             <pc:sldMk cId="1878848435" sldId="256"/>
@@ -362,7 +354,7 @@
         </pc:sldMkLst>
       </pc:sldChg>
       <pc:sldChg chg="modSp add del mod setBg">
-        <pc:chgData name="Michael Hill" userId="41dba03d-e58d-4389-9894-554c10310ba4" providerId="ADAL" clId="{EF23FE1D-A042-481E-AFD7-2A9FB0847F54}" dt="2025-09-30T19:17:31.959" v="70" actId="47"/>
+        <pc:chgData name="Michael Hill" userId="41dba03d-e58d-4389-9894-554c10310ba4" providerId="ADAL" clId="{EF23FE1D-A042-481E-AFD7-2A9FB0847F54}" dt="2025-10-20T18:11:09.633" v="6656" actId="120"/>
         <pc:sldMkLst>
           <pc:docMk/>
           <pc:sldMk cId="491706548" sldId="355"/>
@@ -384,7 +376,7 @@
           </ac:spMkLst>
         </pc:spChg>
         <pc:spChg chg="mod">
-          <ac:chgData name="Michael Hill" userId="41dba03d-e58d-4389-9894-554c10310ba4" providerId="ADAL" clId="{EF23FE1D-A042-481E-AFD7-2A9FB0847F54}" dt="2025-09-30T19:17:14.887" v="64" actId="207"/>
+          <ac:chgData name="Michael Hill" userId="41dba03d-e58d-4389-9894-554c10310ba4" providerId="ADAL" clId="{EF23FE1D-A042-481E-AFD7-2A9FB0847F54}" dt="2025-10-20T18:11:09.633" v="6656" actId="120"/>
           <ac:spMkLst>
             <pc:docMk/>
             <pc:sldMk cId="491706548" sldId="355"/>
@@ -454,14 +446,6 @@
             <ac:spMk id="12" creationId="{D6F6DD21-960C-2B98-AEA8-CA2502374279}"/>
           </ac:spMkLst>
         </pc:spChg>
-        <pc:picChg chg="del">
-          <ac:chgData name="Michael Hill" userId="41dba03d-e58d-4389-9894-554c10310ba4" providerId="ADAL" clId="{EF23FE1D-A042-481E-AFD7-2A9FB0847F54}" dt="2025-09-30T19:16:25.676" v="57" actId="478"/>
-          <ac:picMkLst>
-            <pc:docMk/>
-            <pc:sldMk cId="3941057527" sldId="400"/>
-            <ac:picMk id="3" creationId="{063A1E7B-1A8F-C9E8-1B8A-7F1723D2DBAD}"/>
-          </ac:picMkLst>
-        </pc:picChg>
         <pc:picChg chg="add mod">
           <ac:chgData name="Michael Hill" userId="41dba03d-e58d-4389-9894-554c10310ba4" providerId="ADAL" clId="{EF23FE1D-A042-481E-AFD7-2A9FB0847F54}" dt="2025-09-30T19:22:22.736" v="425" actId="1076"/>
           <ac:picMkLst>
@@ -627,14 +611,6 @@
             <ac:picMk id="3" creationId="{19AD37E6-1405-777E-1B28-B18617196795}"/>
           </ac:picMkLst>
         </pc:picChg>
-        <pc:picChg chg="del">
-          <ac:chgData name="Michael Hill" userId="41dba03d-e58d-4389-9894-554c10310ba4" providerId="ADAL" clId="{EF23FE1D-A042-481E-AFD7-2A9FB0847F54}" dt="2025-09-30T19:24:17.791" v="665" actId="478"/>
-          <ac:picMkLst>
-            <pc:docMk/>
-            <pc:sldMk cId="382529306" sldId="428"/>
-            <ac:picMk id="6" creationId="{393F1A72-027B-7E19-E4E6-AC771EA3C737}"/>
-          </ac:picMkLst>
-        </pc:picChg>
       </pc:sldChg>
       <pc:sldChg chg="addSp delSp modSp add mod">
         <pc:chgData name="Michael Hill" userId="41dba03d-e58d-4389-9894-554c10310ba4" providerId="ADAL" clId="{EF23FE1D-A042-481E-AFD7-2A9FB0847F54}" dt="2025-09-30T19:26:37.219" v="1001" actId="20577"/>
@@ -650,14 +626,6 @@
             <ac:spMk id="8" creationId="{BD688B54-FC2E-A01A-BF53-0442DE03D1BA}"/>
           </ac:spMkLst>
         </pc:spChg>
-        <pc:picChg chg="del">
-          <ac:chgData name="Michael Hill" userId="41dba03d-e58d-4389-9894-554c10310ba4" providerId="ADAL" clId="{EF23FE1D-A042-481E-AFD7-2A9FB0847F54}" dt="2025-09-30T19:25:02.794" v="822" actId="478"/>
-          <ac:picMkLst>
-            <pc:docMk/>
-            <pc:sldMk cId="908018216" sldId="429"/>
-            <ac:picMk id="3" creationId="{688222C3-A445-9304-5DEF-5ACE35BFC8D1}"/>
-          </ac:picMkLst>
-        </pc:picChg>
         <pc:picChg chg="add mod modCrop">
           <ac:chgData name="Michael Hill" userId="41dba03d-e58d-4389-9894-554c10310ba4" providerId="ADAL" clId="{EF23FE1D-A042-481E-AFD7-2A9FB0847F54}" dt="2025-09-30T19:25:53.766" v="832" actId="1076"/>
           <ac:picMkLst>
@@ -712,14 +680,6 @@
             <ac:picMk id="3" creationId="{C27058EE-C36D-029A-0800-BE5ADC67524A}"/>
           </ac:picMkLst>
         </pc:picChg>
-        <pc:picChg chg="del">
-          <ac:chgData name="Michael Hill" userId="41dba03d-e58d-4389-9894-554c10310ba4" providerId="ADAL" clId="{EF23FE1D-A042-481E-AFD7-2A9FB0847F54}" dt="2025-09-30T19:28:02.194" v="1327" actId="478"/>
-          <ac:picMkLst>
-            <pc:docMk/>
-            <pc:sldMk cId="1984688680" sldId="431"/>
-            <ac:picMk id="6" creationId="{9623F190-C6A8-6B5F-37E4-B841809DFABD}"/>
-          </ac:picMkLst>
-        </pc:picChg>
       </pc:sldChg>
       <pc:sldChg chg="addSp delSp modSp add mod">
         <pc:chgData name="Michael Hill" userId="41dba03d-e58d-4389-9894-554c10310ba4" providerId="ADAL" clId="{EF23FE1D-A042-481E-AFD7-2A9FB0847F54}" dt="2025-09-30T19:42:37.344" v="2528" actId="1076"/>
@@ -743,14 +703,6 @@
             <ac:spMk id="8" creationId="{D7D4A6AA-64F8-D86B-E068-E988EF8396D3}"/>
           </ac:spMkLst>
         </pc:spChg>
-        <pc:picChg chg="del">
-          <ac:chgData name="Michael Hill" userId="41dba03d-e58d-4389-9894-554c10310ba4" providerId="ADAL" clId="{EF23FE1D-A042-481E-AFD7-2A9FB0847F54}" dt="2025-09-30T19:41:21.248" v="2522" actId="478"/>
-          <ac:picMkLst>
-            <pc:docMk/>
-            <pc:sldMk cId="3022522073" sldId="432"/>
-            <ac:picMk id="3" creationId="{8DC674E6-B3DF-FBA1-1617-BB4981864E53}"/>
-          </ac:picMkLst>
-        </pc:picChg>
         <pc:picChg chg="add mod">
           <ac:chgData name="Michael Hill" userId="41dba03d-e58d-4389-9894-554c10310ba4" providerId="ADAL" clId="{EF23FE1D-A042-481E-AFD7-2A9FB0847F54}" dt="2025-09-30T19:42:37.344" v="2528" actId="1076"/>
           <ac:picMkLst>
@@ -774,14 +726,6 @@
             <ac:spMk id="8" creationId="{10289BBE-71A7-6B0A-0D74-A020FD9EF609}"/>
           </ac:spMkLst>
         </pc:spChg>
-        <pc:picChg chg="del">
-          <ac:chgData name="Michael Hill" userId="41dba03d-e58d-4389-9894-554c10310ba4" providerId="ADAL" clId="{EF23FE1D-A042-481E-AFD7-2A9FB0847F54}" dt="2025-09-30T19:42:41.207" v="2529" actId="478"/>
-          <ac:picMkLst>
-            <pc:docMk/>
-            <pc:sldMk cId="2127868973" sldId="433"/>
-            <ac:picMk id="3" creationId="{187530AC-8521-26D1-50B5-8F3C74D8E741}"/>
-          </ac:picMkLst>
-        </pc:picChg>
       </pc:sldChg>
       <pc:sldChg chg="modSp add mod">
         <pc:chgData name="Michael Hill" userId="41dba03d-e58d-4389-9894-554c10310ba4" providerId="ADAL" clId="{EF23FE1D-A042-481E-AFD7-2A9FB0847F54}" dt="2025-09-30T19:43:55.919" v="2683" actId="2711"/>
@@ -1112,7 +1056,7 @@
           <a:p>
             <a:fld id="{4C0EF95B-9744-42BF-8E95-B5A640A352E6}" type="datetimeFigureOut">
               <a:rPr lang="en-US" smtClean="0"/>
-              <a:t>9/30/2025</a:t>
+              <a:t>10/20/2025</a:t>
             </a:fld>
             <a:endParaRPr lang="en-US"/>
           </a:p>
@@ -1634,7 +1578,7 @@
           <a:p>
             <a:fld id="{52CFA067-BC5A-4095-A3A5-99A1BAFE9208}" type="datetimeFigureOut">
               <a:rPr lang="en-US" smtClean="0"/>
-              <a:t>9/30/2025</a:t>
+              <a:t>10/20/2025</a:t>
             </a:fld>
             <a:endParaRPr lang="en-US"/>
           </a:p>
@@ -1832,7 +1776,7 @@
           <a:p>
             <a:fld id="{52CFA067-BC5A-4095-A3A5-99A1BAFE9208}" type="datetimeFigureOut">
               <a:rPr lang="en-US" smtClean="0"/>
-              <a:t>9/30/2025</a:t>
+              <a:t>10/20/2025</a:t>
             </a:fld>
             <a:endParaRPr lang="en-US"/>
           </a:p>
@@ -2040,7 +1984,7 @@
           <a:p>
             <a:fld id="{52CFA067-BC5A-4095-A3A5-99A1BAFE9208}" type="datetimeFigureOut">
               <a:rPr lang="en-US" smtClean="0"/>
-              <a:t>9/30/2025</a:t>
+              <a:t>10/20/2025</a:t>
             </a:fld>
             <a:endParaRPr lang="en-US"/>
           </a:p>
@@ -2238,7 +2182,7 @@
           <a:p>
             <a:fld id="{52CFA067-BC5A-4095-A3A5-99A1BAFE9208}" type="datetimeFigureOut">
               <a:rPr lang="en-US" smtClean="0"/>
-              <a:t>9/30/2025</a:t>
+              <a:t>10/20/2025</a:t>
             </a:fld>
             <a:endParaRPr lang="en-US"/>
           </a:p>
@@ -2513,7 +2457,7 @@
           <a:p>
             <a:fld id="{52CFA067-BC5A-4095-A3A5-99A1BAFE9208}" type="datetimeFigureOut">
               <a:rPr lang="en-US" smtClean="0"/>
-              <a:t>9/30/2025</a:t>
+              <a:t>10/20/2025</a:t>
             </a:fld>
             <a:endParaRPr lang="en-US"/>
           </a:p>
@@ -2778,7 +2722,7 @@
           <a:p>
             <a:fld id="{52CFA067-BC5A-4095-A3A5-99A1BAFE9208}" type="datetimeFigureOut">
               <a:rPr lang="en-US" smtClean="0"/>
-              <a:t>9/30/2025</a:t>
+              <a:t>10/20/2025</a:t>
             </a:fld>
             <a:endParaRPr lang="en-US"/>
           </a:p>
@@ -3190,7 +3134,7 @@
           <a:p>
             <a:fld id="{52CFA067-BC5A-4095-A3A5-99A1BAFE9208}" type="datetimeFigureOut">
               <a:rPr lang="en-US" smtClean="0"/>
-              <a:t>9/30/2025</a:t>
+              <a:t>10/20/2025</a:t>
             </a:fld>
             <a:endParaRPr lang="en-US"/>
           </a:p>
@@ -3331,7 +3275,7 @@
           <a:p>
             <a:fld id="{52CFA067-BC5A-4095-A3A5-99A1BAFE9208}" type="datetimeFigureOut">
               <a:rPr lang="en-US" smtClean="0"/>
-              <a:t>9/30/2025</a:t>
+              <a:t>10/20/2025</a:t>
             </a:fld>
             <a:endParaRPr lang="en-US"/>
           </a:p>
@@ -3444,7 +3388,7 @@
           <a:p>
             <a:fld id="{52CFA067-BC5A-4095-A3A5-99A1BAFE9208}" type="datetimeFigureOut">
               <a:rPr lang="en-US" smtClean="0"/>
-              <a:t>9/30/2025</a:t>
+              <a:t>10/20/2025</a:t>
             </a:fld>
             <a:endParaRPr lang="en-US"/>
           </a:p>
@@ -3755,7 +3699,7 @@
           <a:p>
             <a:fld id="{52CFA067-BC5A-4095-A3A5-99A1BAFE9208}" type="datetimeFigureOut">
               <a:rPr lang="en-US" smtClean="0"/>
-              <a:t>9/30/2025</a:t>
+              <a:t>10/20/2025</a:t>
             </a:fld>
             <a:endParaRPr lang="en-US"/>
           </a:p>
@@ -4043,7 +3987,7 @@
           <a:p>
             <a:fld id="{52CFA067-BC5A-4095-A3A5-99A1BAFE9208}" type="datetimeFigureOut">
               <a:rPr lang="en-US" smtClean="0"/>
-              <a:t>9/30/2025</a:t>
+              <a:t>10/20/2025</a:t>
             </a:fld>
             <a:endParaRPr lang="en-US"/>
           </a:p>
@@ -4284,7 +4228,7 @@
           <a:p>
             <a:fld id="{52CFA067-BC5A-4095-A3A5-99A1BAFE9208}" type="datetimeFigureOut">
               <a:rPr lang="en-US" smtClean="0"/>
-              <a:t>9/30/2025</a:t>
+              <a:t>10/20/2025</a:t>
             </a:fld>
             <a:endParaRPr lang="en-US"/>
           </a:p>
@@ -4835,19 +4779,19 @@
           <a:p>
             <a:pPr algn="ctr"/>
             <a:r>
-              <a:rPr lang="en-US" sz="6000" dirty="0">
+              <a:rPr lang="en-US" sz="4800" dirty="0">
                 <a:latin typeface="Bahnschrift SemiBold" panose="020B0502040204020203" pitchFamily="34" charset="0"/>
               </a:rPr>
-              <a:t>TOPIC B2:</a:t>
+              <a:t>TOPIC B1:</a:t>
             </a:r>
           </a:p>
           <a:p>
             <a:pPr algn="ctr"/>
             <a:r>
-              <a:rPr lang="en-US" sz="6000" dirty="0">
+              <a:rPr lang="en-US" sz="4800" dirty="0">
                 <a:latin typeface="Bahnschrift SemiBold" panose="020B0502040204020203" pitchFamily="34" charset="0"/>
               </a:rPr>
-              <a:t>PROGRAMMING</a:t>
+              <a:t>PROBLEM SPECIFICATION</a:t>
             </a:r>
           </a:p>
         </p:txBody>
@@ -4916,10 +4860,16 @@
           <a:p>
             <a:pPr algn="ctr"/>
             <a:r>
+              <a:rPr lang="en-US" sz="4800">
+                <a:latin typeface="Bahnschrift SemiBold" panose="020B0502040204020203" pitchFamily="34" charset="0"/>
+              </a:rPr>
+              <a:t>LESSON B1-</a:t>
+            </a:r>
+            <a:r>
               <a:rPr lang="en-US" sz="4800" dirty="0">
                 <a:latin typeface="Bahnschrift SemiBold" panose="020B0502040204020203" pitchFamily="34" charset="0"/>
               </a:rPr>
-              <a:t>LESSON B1-1</a:t>
+              <a:t>1</a:t>
             </a:r>
           </a:p>
         </p:txBody>
@@ -14987,20 +14937,86 @@
           <a:lstStyle/>
           <a:p>
             <a:pPr marL="457200" indent="-457200">
-              <a:spcBef>
-                <a:spcPts val="1200"/>
-              </a:spcBef>
               <a:buFont typeface="Arial" panose="020B0604020202020204" pitchFamily="34" charset="0"/>
               <a:buChar char="•"/>
             </a:pPr>
             <a:r>
               <a:rPr lang="en-US" sz="2800" dirty="0">
-                <a:solidFill>
-                  <a:schemeClr val="bg1"/>
-                </a:solidFill>
                 <a:latin typeface="Bahnschrift" panose="020B0502040204020203" pitchFamily="34" charset="0"/>
               </a:rPr>
-              <a:t>Recursion</a:t>
+              <a:t>Problem Specification</a:t>
+            </a:r>
+          </a:p>
+          <a:p>
+            <a:pPr marL="457200" indent="-457200">
+              <a:buFont typeface="Arial" panose="020B0604020202020204" pitchFamily="34" charset="0"/>
+              <a:buChar char="•"/>
+            </a:pPr>
+            <a:r>
+              <a:rPr lang="en-US" sz="2800" dirty="0">
+                <a:latin typeface="Bahnschrift" panose="020B0502040204020203" pitchFamily="34" charset="0"/>
+              </a:rPr>
+              <a:t>Problem Statement</a:t>
+            </a:r>
+          </a:p>
+          <a:p>
+            <a:pPr marL="457200" indent="-457200">
+              <a:buFont typeface="Arial" panose="020B0604020202020204" pitchFamily="34" charset="0"/>
+              <a:buChar char="•"/>
+            </a:pPr>
+            <a:r>
+              <a:rPr lang="en-US" sz="2800" dirty="0">
+                <a:latin typeface="Bahnschrift" panose="020B0502040204020203" pitchFamily="34" charset="0"/>
+              </a:rPr>
+              <a:t>Constraints &amp; Limitations</a:t>
+            </a:r>
+          </a:p>
+          <a:p>
+            <a:pPr marL="457200" indent="-457200">
+              <a:buFont typeface="Arial" panose="020B0604020202020204" pitchFamily="34" charset="0"/>
+              <a:buChar char="•"/>
+            </a:pPr>
+            <a:r>
+              <a:rPr lang="en-US" sz="2800" dirty="0">
+                <a:latin typeface="Bahnschrift" panose="020B0502040204020203" pitchFamily="34" charset="0"/>
+              </a:rPr>
+              <a:t>Goals &amp; Objectives</a:t>
+            </a:r>
+          </a:p>
+          <a:p>
+            <a:pPr marL="457200" indent="-457200">
+              <a:buFont typeface="Arial" panose="020B0604020202020204" pitchFamily="34" charset="0"/>
+              <a:buChar char="•"/>
+            </a:pPr>
+            <a:r>
+              <a:rPr lang="en-US" sz="2800" dirty="0">
+                <a:latin typeface="Bahnschrift" panose="020B0502040204020203" pitchFamily="34" charset="0"/>
+              </a:rPr>
+              <a:t>Input &amp; Output</a:t>
+            </a:r>
+          </a:p>
+          <a:p>
+            <a:pPr marL="457200" indent="-457200">
+              <a:buFont typeface="Arial" panose="020B0604020202020204" pitchFamily="34" charset="0"/>
+              <a:buChar char="•"/>
+            </a:pPr>
+            <a:r>
+              <a:rPr lang="en-US" sz="2800" dirty="0">
+                <a:latin typeface="Bahnschrift" panose="020B0502040204020203" pitchFamily="34" charset="0"/>
+              </a:rPr>
+              <a:t>Evaluation Criteria</a:t>
+            </a:r>
+          </a:p>
+          <a:p>
+            <a:pPr marL="457200" indent="-457200">
+              <a:buFont typeface="Arial" panose="020B0604020202020204" pitchFamily="34" charset="0"/>
+              <a:buChar char="•"/>
+            </a:pPr>
+            <a:r>
+              <a:rPr lang="en-US" sz="2800" dirty="0">
+                <a:latin typeface="Bahnschrift" panose="020B0502040204020203" pitchFamily="34" charset="0"/>
+              </a:rPr>
+              <a:t>Stakeholders</a:t>
             </a:r>
           </a:p>
         </p:txBody>
